--- a/docs/HDFC_Quantum_Executive_Deck.pptx
+++ b/docs/HDFC_Quantum_Executive_Deck.pptx
@@ -4852,7 +4852,7 @@
                 </a:solidFill>
                 <a:latin typeface="Calibri"/>
               </a:rPr>
-              <a:t>Why HDFC should invest now — a credit-card fraud case study,</a:t>
+              <a:t>A credit-card fraud case study,</a:t>
             </a:r>
           </a:p>
         </p:txBody>
@@ -4960,13 +4960,13 @@
           <a:p>
             <a:pPr algn="l"/>
             <a:r>
-              <a:rPr sz="1400" b="0" i="0">
-                <a:solidFill>
-                  <a:srgbClr val="E6EAF2"/>
-                </a:solidFill>
-                <a:latin typeface="Calibri"/>
-              </a:rPr>
-              <a:t>Prepared for: MD • CEO • CTO • Enterprise Architects • Engineering Heads</a:t>
+              <a:rPr sz="1400" b="1" i="0">
+                <a:solidFill>
+                  <a:srgbClr val="E6EAF2"/>
+                </a:solidFill>
+                <a:latin typeface="Calibri"/>
+              </a:rPr>
+              <a:t>Author: SVP — Kranthi Molleti</a:t>
             </a:r>
           </a:p>
         </p:txBody>
@@ -4974,41 +4974,6 @@
       <p:sp>
         <p:nvSpPr>
           <p:cNvPr id="12" name="TextBox 11"/>
-          <p:cNvSpPr txBox="1"/>
-          <p:nvPr/>
-        </p:nvSpPr>
-        <p:spPr>
-          <a:xfrm>
-            <a:off x="1097280" y="5074920"/>
-            <a:ext cx="7315200" cy="365760"/>
-          </a:xfrm>
-          <a:prstGeom prst="rect">
-            <a:avLst/>
-          </a:prstGeom>
-          <a:noFill/>
-        </p:spPr>
-        <p:txBody>
-          <a:bodyPr wrap="square" lIns="45720" rIns="45720" tIns="18288" bIns="18288" anchor="t">
-            <a:spAutoFit/>
-          </a:bodyPr>
-          <a:lstStyle/>
-          <a:p>
-            <a:pPr algn="l"/>
-            <a:r>
-              <a:rPr sz="1400" b="0" i="0">
-                <a:solidFill>
-                  <a:srgbClr val="9AA5BC"/>
-                </a:solidFill>
-                <a:latin typeface="Calibri"/>
-              </a:rPr>
-              <a:t>Author: SVP • Office of Emerging Technology</a:t>
-            </a:r>
-          </a:p>
-        </p:txBody>
-      </p:sp>
-      <p:sp>
-        <p:nvSpPr>
-          <p:cNvPr id="13" name="TextBox 12"/>
           <p:cNvSpPr txBox="1"/>
           <p:nvPr/>
         </p:nvSpPr>
